--- a/week-01/presentations/ppts/day-01-ai-fundamentals-prompting.pptx
+++ b/week-01/presentations/ppts/day-01-ai-fundamentals-prompting.pptx
@@ -6397,7 +6397,7 @@
             </a:pPr>
             <a:r>
               <a:rPr/>
-              <a:t>🧿 Use 3 — Self-Critique Loop</a:t>
+              <a:t>🤖 Use 3 — Self-Critique Loop</a:t>
             </a:r>
           </a:p>
         </p:txBody>

--- a/week-01/presentations/ppts/day-01-ai-fundamentals-prompting.pptx
+++ b/week-01/presentations/ppts/day-01-ai-fundamentals-prompting.pptx
@@ -6422,7 +6422,7 @@
             </a:pPr>
             <a:r>
               <a:rPr/>
-              <a:t>Before sharing a PRD, persona, or problem statement, run a structured critique pass:</a:t>
+              <a:t>Before sharing a product requirements document (PRD), persona, or problem statement, run a structured critique pass:</a:t>
             </a:r>
           </a:p>
           <a:p>

--- a/week-01/presentations/ppts/day-01-ai-fundamentals-prompting.pptx
+++ b/week-01/presentations/ppts/day-01-ai-fundamentals-prompting.pptx
@@ -5817,6 +5817,17 @@
             </a:r>
           </a:p>
           <a:p>
+            <a:pPr lvl="0" indent="0">
+              <a:buNone/>
+            </a:pPr>
+            <a:r>
+              <a:rPr>
+                <a:latin typeface="Courier"/>
+              </a:rPr>
+              <a:t>Write me a user persona for a dispatch app.</a:t>
+            </a:r>
+          </a:p>
+          <a:p>
             <a:pPr lvl="0" indent="0" marL="0">
               <a:buNone/>
             </a:pPr>
@@ -5832,6 +5843,26 @@
             <a:r>
               <a:rPr/>
               <a:t>✅ Scaffolded prompt</a:t>
+            </a:r>
+          </a:p>
+          <a:p>
+            <a:pPr lvl="0" indent="0">
+              <a:buNone/>
+            </a:pPr>
+            <a:r>
+              <a:rPr>
+                <a:latin typeface="Courier"/>
+              </a:rPr>
+              <a:t>Role: Senior TPM for a field-service SaaS.
+Context: Target user = dispatcher at an HVAC
+company, 50–200 techs, 10+ yrs industry, low
+tolerance for screens. Pain: re-routing mid-day
+when a tech calls out sick.
+Constraints: Persona must be grounded in the
+behaviors above; flag any field that is an
+assumption I'd need to validate.
+Format: Markdown persona sheet with a final
+"Assumptions to validate" section.</a:t>
             </a:r>
           </a:p>
         </p:txBody>
@@ -6351,6 +6382,24 @@
             <a:r>
               <a:rPr/>
               <a:t>When you feed a model a transcript, survey, or support-ticket batch, ask it to tag each claim with where in the source it came from. Unsourced claims are the ones to interrogate.</a:t>
+            </a:r>
+          </a:p>
+          <a:p>
+            <a:pPr lvl="0" indent="0">
+              <a:buNone/>
+            </a:pPr>
+            <a:r>
+              <a:rPr>
+                <a:latin typeface="Courier"/>
+              </a:rPr>
+              <a:t>Role: Research analyst.
+Context: Below are 14 support tickets from FieldPulse dispatchers.
+Task: Extract the top 5 recurring frustrations.
+Constraints:
+- Each frustration must cite 2+ ticket numbers as evidence
+- Flag any frustration you inferred without direct evidence
+Format: Markdown list; each entry: Frustration / Evidence tickets / Confidence (H/M/L).
+</a:t>
             </a:r>
           </a:p>
         </p:txBody>

--- a/week-01/presentations/ppts/day-01-ai-fundamentals-prompting.pptx
+++ b/week-01/presentations/ppts/day-01-ai-fundamentals-prompting.pptx
@@ -1286,7 +1286,7 @@
             </a:pPr>
             <a:r>
               <a:rPr/>
-              <a:t>This activity produces artifacts the triads will actually reuse on Day 3 and Day 5. Make sure each triad keeps their output.</a:t>
+              <a:t>This activity produces artifacts the quads will actually reuse on Day 3 and Day 5. Make sure each quad keeps their output.</a:t>
             </a:r>
           </a:p>
         </p:txBody>
@@ -2352,7 +2352,7 @@
             </a:pPr>
             <a:r>
               <a:rPr/>
-              <a:t>This is the first collaborative exercise of the academy. Help triads discover differences — don’t pre-answer. The surprise that same question yields different answers is half the learning.</a:t>
+              <a:t>This is the first collaborative exercise of the academy. Help quads discover differences — don’t pre-answer. The surprise that same question yields different answers is half the learning.</a:t>
             </a:r>
           </a:p>
         </p:txBody>
@@ -6045,16 +6045,16 @@
             </a:pPr>
             <a:r>
               <a:rPr b="1"/>
-              <a:t>Triads • 40 minutes</a:t>
-            </a:r>
-          </a:p>
-          <a:p>
-            <a:pPr lvl="0" indent="0" marL="0">
-              <a:buNone/>
-            </a:pPr>
-            <a:r>
-              <a:rPr/>
-              <a:t>Each triad receives three weak prompts taken from the FieldPulse backlog. Rewrite each one using RCCF, then run the original and the rewrite side-by-side.</a:t>
+              <a:t>Quads • 40 minutes</a:t>
+            </a:r>
+          </a:p>
+          <a:p>
+            <a:pPr lvl="0" indent="0" marL="0">
+              <a:buNone/>
+            </a:pPr>
+            <a:r>
+              <a:rPr/>
+              <a:t>Each quad receives three weak prompts taken from the FieldPulse backlog. Rewrite each one using RCCF, then run the original and the rewrite side-by-side.</a:t>
             </a:r>
           </a:p>
           <a:p>
@@ -6072,16 +6072,16 @@
             </a:pPr>
             <a:r>
               <a:rPr/>
-              <a:t>Add one prompt to your triad’s Prompt Pattern Library</a:t>
-            </a:r>
-          </a:p>
-          <a:p>
-            <a:pPr lvl="0" indent="0" marL="0">
-              <a:buNone/>
-            </a:pPr>
-            <a:r>
-              <a:rPr/>
-              <a:t>Star the prompt your triad would actually reuse on Monday morning</a:t>
+              <a:t>Add one prompt to your quad’s Prompt Pattern Library</a:t>
+            </a:r>
+          </a:p>
+          <a:p>
+            <a:pPr lvl="0" indent="0" marL="0">
+              <a:buNone/>
+            </a:pPr>
+            <a:r>
+              <a:rPr/>
+              <a:t>Star the prompt your quad would actually reuse on Monday morning</a:t>
             </a:r>
           </a:p>
           <a:p>
@@ -6582,16 +6582,16 @@
             </a:pPr>
             <a:r>
               <a:rPr b="1"/>
-              <a:t>Triads • 40 minutes</a:t>
-            </a:r>
-          </a:p>
-          <a:p>
-            <a:pPr lvl="0" indent="0" marL="0">
-              <a:buNone/>
-            </a:pPr>
-            <a:r>
-              <a:rPr/>
-              <a:t>Each triad takes the FieldPulse one-paragraph problem brief (provided). Using AI, run it through three critique hats: Engineer, Blocker-stakeholder, Target customer.</a:t>
+              <a:t>Quads • 40 minutes</a:t>
+            </a:r>
+          </a:p>
+          <a:p>
+            <a:pPr lvl="0" indent="0" marL="0">
+              <a:buNone/>
+            </a:pPr>
+            <a:r>
+              <a:rPr/>
+              <a:t>Each quad takes the FieldPulse one-paragraph problem brief (provided). Using AI, run it through three critique hats: Engineer, Blocker-stakeholder, Target customer.</a:t>
             </a:r>
           </a:p>
           <a:p>
@@ -6609,7 +6609,7 @@
             </a:pPr>
             <a:r>
               <a:rPr/>
-              <a:t>Decide which one your triad cannot answer yet — that becomes your Day 3 research question</a:t>
+              <a:t>Decide which one your quad cannot answer yet — that becomes your Day 3 research question</a:t>
             </a:r>
           </a:p>
           <a:p>
@@ -7248,16 +7248,16 @@
             </a:pPr>
             <a:r>
               <a:rPr b="1"/>
-              <a:t>Triads • 45 minutes • Readouts</a:t>
-            </a:r>
-          </a:p>
-          <a:p>
-            <a:pPr lvl="0" indent="0" marL="0">
-              <a:buNone/>
-            </a:pPr>
-            <a:r>
-              <a:rPr/>
-              <a:t>Each triad finalizes a shared Prompt Pattern Library for use the rest of the academy. Minimum four entries:</a:t>
+              <a:t>Quads • 45 minutes • Readouts</a:t>
+            </a:r>
+          </a:p>
+          <a:p>
+            <a:pPr lvl="0" indent="0" marL="0">
+              <a:buNone/>
+            </a:pPr>
+            <a:r>
+              <a:rPr/>
+              <a:t>Each quad finalizes a shared Prompt Pattern Library for use the rest of the academy. Minimum four entries:</a:t>
             </a:r>
           </a:p>
           <a:p>
@@ -7302,7 +7302,7 @@
             </a:pPr>
             <a:r>
               <a:rPr/>
-              <a:t>⏱ 25 min draft · 10 min test · 10 min triad readout</a:t>
+              <a:t>⏱ 25 min draft · 10 min test · 10 min quad readout</a:t>
             </a:r>
           </a:p>
         </p:txBody>
@@ -7410,7 +7410,7 @@
             </a:pPr>
             <a:r>
               <a:rPr/>
-              <a:t>A Prompt Pattern Library per triad</a:t>
+              <a:t>A Prompt Pattern Library per quad</a:t>
             </a:r>
           </a:p>
           <a:p>
@@ -7437,16 +7437,16 @@
             </a:pPr>
             <a:r>
               <a:rPr/>
-              <a:t>Your triad will use today’s prompts to draft and critique your first PR/FAQ</a:t>
-            </a:r>
-          </a:p>
-          <a:p>
-            <a:pPr lvl="0" indent="0" marL="0">
-              <a:buNone/>
-            </a:pPr>
-            <a:r>
-              <a:rPr/>
-              <a:t>Bring to Day 2: Your triad’s Prompt Pattern Library + one domain you’d like to draft a Working-Backwards PR for.</a:t>
+              <a:t>Your quad will use today’s prompts to draft and critique your first PR/FAQ</a:t>
+            </a:r>
+          </a:p>
+          <a:p>
+            <a:pPr lvl="0" indent="0" marL="0">
+              <a:buNone/>
+            </a:pPr>
+            <a:r>
+              <a:rPr/>
+              <a:t>Bring to Day 2: Your quad’s Prompt Pattern Library + one domain you’d like to draft a Working-Backwards PR for.</a:t>
             </a:r>
           </a:p>
         </p:txBody>
@@ -7704,7 +7704,7 @@
             </a:pPr>
             <a:r>
               <a:rPr/>
-              <a:t>Build a personal Prompt Pattern Library with your cohort triad</a:t>
+              <a:t>Build a personal Prompt Pattern Library with your cohort quad</a:t>
             </a:r>
           </a:p>
         </p:txBody>
@@ -7821,7 +7821,7 @@
             </a:pPr>
             <a:r>
               <a:rPr/>
-              <a:t>Meet your triad, ground the week</a:t>
+              <a:t>Meet your quad, ground the week</a:t>
             </a:r>
           </a:p>
           <a:p>
@@ -8367,16 +8367,16 @@
             </a:pPr>
             <a:r>
               <a:rPr b="1"/>
-              <a:t>Triads • 35 minutes</a:t>
-            </a:r>
-          </a:p>
-          <a:p>
-            <a:pPr lvl="0" indent="0" marL="0">
-              <a:buNone/>
-            </a:pPr>
-            <a:r>
-              <a:rPr/>
-              <a:t>Each triad picks one open PM question (provided list of 10). Each member asks the same question to a different tool (ChatGPT, Claude, Gemini/Copilot).</a:t>
+              <a:t>Quads • 35 minutes</a:t>
+            </a:r>
+          </a:p>
+          <a:p>
+            <a:pPr lvl="0" indent="0" marL="0">
+              <a:buNone/>
+            </a:pPr>
+            <a:r>
+              <a:rPr/>
+              <a:t>Each quad picks one open PM question (provided list of 10). Each member asks the same question to a different tool (ChatGPT, Claude, Gemini/Copilot).</a:t>
             </a:r>
           </a:p>
           <a:p>

--- a/week-01/presentations/ppts/day-01-ai-fundamentals-prompting.pptx
+++ b/week-01/presentations/ppts/day-01-ai-fundamentals-prompting.pptx
@@ -6045,7 +6045,7 @@
             </a:pPr>
             <a:r>
               <a:rPr b="1"/>
-              <a:t>Quads • 40 minutes</a:t>
+              <a:t>Quads • 50 minutes</a:t>
             </a:r>
           </a:p>
           <a:p>
@@ -6582,7 +6582,7 @@
             </a:pPr>
             <a:r>
               <a:rPr b="1"/>
-              <a:t>Quads • 40 minutes</a:t>
+              <a:t>Quads • 50 minutes</a:t>
             </a:r>
           </a:p>
           <a:p>
@@ -7248,7 +7248,7 @@
             </a:pPr>
             <a:r>
               <a:rPr b="1"/>
-              <a:t>Quads • 45 minutes • Readouts</a:t>
+              <a:t>Quads • 55 minutes • Readouts</a:t>
             </a:r>
           </a:p>
           <a:p>
@@ -8367,7 +8367,7 @@
             </a:pPr>
             <a:r>
               <a:rPr b="1"/>
-              <a:t>Quads • 35 minutes</a:t>
+              <a:t>Quads • 45 minutes</a:t>
             </a:r>
           </a:p>
           <a:p>

--- a/week-01/presentations/ppts/day-01-ai-fundamentals-prompting.pptx
+++ b/week-01/presentations/ppts/day-01-ai-fundamentals-prompting.pptx
@@ -6090,7 +6090,7 @@
             </a:pPr>
             <a:r>
               <a:rPr/>
-              <a:t>⏱ 15 min rewrite · 15 min run · 10 min library entry</a:t>
+              <a:t>⏱ 25 min rewrite · 15 min run · 10 min library entry</a:t>
             </a:r>
           </a:p>
         </p:txBody>
@@ -6618,7 +6618,7 @@
             </a:pPr>
             <a:r>
               <a:rPr/>
-              <a:t>⏱ 10 min each hat · 10 min synthesize</a:t>
+              <a:t>⏱ 10 min each hat · 20 min synthesize</a:t>
             </a:r>
           </a:p>
         </p:txBody>
@@ -7302,7 +7302,7 @@
             </a:pPr>
             <a:r>
               <a:rPr/>
-              <a:t>⏱ 25 min draft · 10 min test · 10 min quad readout</a:t>
+              <a:t>⏱ 35 min draft · 10 min test · 10 min quad readout</a:t>
             </a:r>
           </a:p>
         </p:txBody>
@@ -8412,7 +8412,7 @@
             </a:pPr>
             <a:r>
               <a:rPr/>
-              <a:t>⏱ 10 min prompt · 15 min compare · 10 min write readout</a:t>
+              <a:t>⏱ 10 min prompt · 25 min compare · 10 min write readout</a:t>
             </a:r>
           </a:p>
         </p:txBody>
